--- a/classes/parte-6-analisis-de-malware/156-reglas-yara-para-deteccion/clase-156-presentacion.pptx
+++ b/classes/parte-6-analisis-de-malware/156-reglas-yara-para-deteccion/clase-156-presentacion.pptx
@@ -17,6 +17,9 @@
     <p:sldId id="265" r:id="rId16"/>
     <p:sldId id="266" r:id="rId17"/>
     <p:sldId id="267" r:id="rId18"/>
+    <p:sldId id="268" r:id="rId19"/>
+    <p:sldId id="269" r:id="rId20"/>
+    <p:sldId id="270" r:id="rId21"/>
   </p:sldIdLst>
   <p:sldSz cx="9144000" cy="6858000" type="screen4x3"/>
   <p:notesSz cx="6858000" cy="9144000"/>
@@ -3198,7 +3201,7 @@
                   <a:srgbClr val="0B3D2E"/>
                 </a:solidFill>
               </a:rPr>
-              <a:t>⚠️ Errores comunes</a:t>
+              <a:t>✍️ Ejercicios</a:t>
             </a:r>
           </a:p>
         </p:txBody>
@@ -3236,67 +3239,82 @@
                   <a:srgbClr val="22282E"/>
                 </a:solidFill>
               </a:rPr>
-              <a:t>•  Muchos falsos positivos — Cadenas genéricas; usa strings únicos y N of</a:t>
-            </a:r>
-          </a:p>
-          <a:p>
-            <a:pPr>
-              <a:spcAft>
-                <a:spcPts val="600"/>
-              </a:spcAft>
-            </a:pPr>
-            <a:r>
-              <a:rPr sz="1500">
-                <a:solidFill>
-                  <a:srgbClr val="22282E"/>
-                </a:solidFill>
-              </a:rPr>
-              <a:t>•  No detecta variantes — Regla atada a una muestra; generaliza con hex+comodines</a:t>
-            </a:r>
-          </a:p>
-          <a:p>
-            <a:pPr>
-              <a:spcAft>
-                <a:spcPts val="600"/>
-              </a:spcAft>
-            </a:pPr>
-            <a:r>
-              <a:rPr sz="1500">
-                <a:solidFill>
-                  <a:srgbClr val="22282E"/>
-                </a:solidFill>
-              </a:rPr>
-              <a:t>•  Regla no compila — Sintaxis de condition/strings; revisa comillas y llaves</a:t>
-            </a:r>
-          </a:p>
-          <a:p>
-            <a:pPr>
-              <a:spcAft>
-                <a:spcPts val="600"/>
-              </a:spcAft>
-            </a:pPr>
-            <a:r>
-              <a:rPr sz="1500">
-                <a:solidFill>
-                  <a:srgbClr val="22282E"/>
-                </a:solidFill>
-              </a:rPr>
-              <a:t>•  imphash no coincide — El packer cambia imports; usa imphash del binario desempacado</a:t>
-            </a:r>
-          </a:p>
-          <a:p>
-            <a:pPr>
-              <a:spcAft>
-                <a:spcPts val="600"/>
-              </a:spcAft>
-            </a:pPr>
-            <a:r>
-              <a:rPr sz="1500">
-                <a:solidFill>
-                  <a:srgbClr val="22282E"/>
-                </a:solidFill>
-              </a:rPr>
-              <a:t>•  Lenta en grandes corpus — Evita regex costosos; ancla con uint16(0)==0x5A4D</a:t>
+              <a:t>•  Escribe una regla con cadenas de texto, hex y regex.</a:t>
+            </a:r>
+          </a:p>
+          <a:p>
+            <a:pPr>
+              <a:spcAft>
+                <a:spcPts val="600"/>
+              </a:spcAft>
+            </a:pPr>
+            <a:r>
+              <a:rPr sz="1500">
+                <a:solidFill>
+                  <a:srgbClr val="22282E"/>
+                </a:solidFill>
+              </a:rPr>
+              <a:t>•  Convierte una firma frágil (una sola string) en una robusta (varias evidencias).</a:t>
+            </a:r>
+          </a:p>
+          <a:p>
+            <a:pPr>
+              <a:spcAft>
+                <a:spcPts val="600"/>
+              </a:spcAft>
+            </a:pPr>
+            <a:r>
+              <a:rPr sz="1500">
+                <a:solidFill>
+                  <a:srgbClr val="22282E"/>
+                </a:solidFill>
+              </a:rPr>
+              <a:t>•  Usa pe.imphash() para agrupar una familia.</a:t>
+            </a:r>
+          </a:p>
+          <a:p>
+            <a:pPr>
+              <a:spcAft>
+                <a:spcPts val="600"/>
+              </a:spcAft>
+            </a:pPr>
+            <a:r>
+              <a:rPr sz="1500">
+                <a:solidFill>
+                  <a:srgbClr val="22282E"/>
+                </a:solidFill>
+              </a:rPr>
+              <a:t>•  Provoca un falso positivo a propósito y luego corrígelo.</a:t>
+            </a:r>
+          </a:p>
+          <a:p>
+            <a:pPr>
+              <a:spcAft>
+                <a:spcPts val="600"/>
+              </a:spcAft>
+            </a:pPr>
+            <a:r>
+              <a:rPr sz="1500">
+                <a:solidFill>
+                  <a:srgbClr val="22282E"/>
+                </a:solidFill>
+              </a:rPr>
+              <a:t>•  Explica cuándo usar all of them vs N of ($s).</a:t>
+            </a:r>
+          </a:p>
+          <a:p>
+            <a:pPr>
+              <a:spcAft>
+                <a:spcPts val="600"/>
+              </a:spcAft>
+            </a:pPr>
+            <a:r>
+              <a:rPr sz="1500">
+                <a:solidFill>
+                  <a:srgbClr val="22282E"/>
+                </a:solidFill>
+              </a:rPr>
+              <a:t>•  Documenta el meta mínimo recomendable de una regla.</a:t>
             </a:r>
           </a:p>
         </p:txBody>
@@ -3347,7 +3365,7 @@
                   <a:srgbClr val="0B3D2E"/>
                 </a:solidFill>
               </a:rPr>
-              <a:t>❓ Preguntas frecuentes</a:t>
+              <a:t>📝 Reto verificable</a:t>
             </a:r>
           </a:p>
         </p:txBody>
@@ -3385,37 +3403,22 @@
                   <a:srgbClr val="22282E"/>
                 </a:solidFill>
               </a:rPr>
-              <a:t>•  ❓ ¿Firmar por familia o por muestra? Por familia. Una regla atada a una muestra caduca con la próxima variante; busca patrones estructurales y de código compartidos.</a:t>
-            </a:r>
-          </a:p>
-          <a:p>
-            <a:pPr>
-              <a:spcAft>
-                <a:spcPts val="600"/>
-              </a:spcAft>
-            </a:pPr>
-            <a:r>
-              <a:rPr sz="1500">
-                <a:solidFill>
-                  <a:srgbClr val="22282E"/>
-                </a:solidFill>
-              </a:rPr>
-              <a:t>•  ❓ ¿YARA sirve en memoria? Sí. Es muy útil escanear volcados de memoria o procesos vivos, donde el código desempacado revela strings ausentes en disco.</a:t>
-            </a:r>
-          </a:p>
-          <a:p>
-            <a:pPr>
-              <a:spcAft>
-                <a:spcPts val="600"/>
-              </a:spcAft>
-            </a:pPr>
-            <a:r>
-              <a:rPr sz="1500">
-                <a:solidFill>
-                  <a:srgbClr val="22282E"/>
-                </a:solidFill>
-              </a:rPr>
-              <a:t>•  ❓ ¿Debo publicar mis reglas? Depende. Compartir ayuda a la comunidad, pero exponer detecciones internas puede permitir al atacante evadirlas; evalúa el contexto.</a:t>
+              <a:t>•  Entrega una regla YARA para una familia que detecte todas tus muestras objetivo y ninguna del corpus de goodware, con meta completo y al menos una condición estructural (pe/imphash).</a:t>
+            </a:r>
+          </a:p>
+          <a:p>
+            <a:pPr>
+              <a:spcAft>
+                <a:spcPts val="600"/>
+              </a:spcAft>
+            </a:pPr>
+            <a:r>
+              <a:rPr sz="1500">
+                <a:solidFill>
+                  <a:srgbClr val="22282E"/>
+                </a:solidFill>
+              </a:rPr>
+              <a:t>•  Criterio de aceptación: yara -r marca el 100% de las muestras de la familia y 0 archivos del corpus de goodware de prueba, y la regla incluye una condición del módulo pe.</a:t>
             </a:r>
           </a:p>
         </p:txBody>
@@ -3466,7 +3469,7 @@
                   <a:srgbClr val="0B3D2E"/>
                 </a:solidFill>
               </a:rPr>
-              <a:t>🔗 Referencias</a:t>
+              <a:t>⚠️ Errores comunes</a:t>
             </a:r>
           </a:p>
         </p:txBody>
@@ -3504,6 +3507,274 @@
                   <a:srgbClr val="22282E"/>
                 </a:solidFill>
               </a:rPr>
+              <a:t>•  Muchos falsos positivos — Cadenas genéricas; usa strings únicos y N of</a:t>
+            </a:r>
+          </a:p>
+          <a:p>
+            <a:pPr>
+              <a:spcAft>
+                <a:spcPts val="600"/>
+              </a:spcAft>
+            </a:pPr>
+            <a:r>
+              <a:rPr sz="1500">
+                <a:solidFill>
+                  <a:srgbClr val="22282E"/>
+                </a:solidFill>
+              </a:rPr>
+              <a:t>•  No detecta variantes — Regla atada a una muestra; generaliza con hex+comodines</a:t>
+            </a:r>
+          </a:p>
+          <a:p>
+            <a:pPr>
+              <a:spcAft>
+                <a:spcPts val="600"/>
+              </a:spcAft>
+            </a:pPr>
+            <a:r>
+              <a:rPr sz="1500">
+                <a:solidFill>
+                  <a:srgbClr val="22282E"/>
+                </a:solidFill>
+              </a:rPr>
+              <a:t>•  Regla no compila — Sintaxis de condition/strings; revisa comillas y llaves</a:t>
+            </a:r>
+          </a:p>
+          <a:p>
+            <a:pPr>
+              <a:spcAft>
+                <a:spcPts val="600"/>
+              </a:spcAft>
+            </a:pPr>
+            <a:r>
+              <a:rPr sz="1500">
+                <a:solidFill>
+                  <a:srgbClr val="22282E"/>
+                </a:solidFill>
+              </a:rPr>
+              <a:t>•  imphash no coincide — El packer cambia imports; usa imphash del binario desempacado</a:t>
+            </a:r>
+          </a:p>
+          <a:p>
+            <a:pPr>
+              <a:spcAft>
+                <a:spcPts val="600"/>
+              </a:spcAft>
+            </a:pPr>
+            <a:r>
+              <a:rPr sz="1500">
+                <a:solidFill>
+                  <a:srgbClr val="22282E"/>
+                </a:solidFill>
+              </a:rPr>
+              <a:t>•  Lenta en grandes corpus — Evita regex costosos; ancla con uint16(0)==0x5A4D</a:t>
+            </a:r>
+          </a:p>
+        </p:txBody>
+      </p:sp>
+    </p:spTree>
+  </p:cSld>
+  <p:clrMapOvr>
+    <a:masterClrMapping/>
+  </p:clrMapOvr>
+</p:sld>
+</file>
+
+<file path=ppt/slides/slide13.xml><?xml version="1.0" encoding="utf-8"?>
+<p:sld xmlns:a="http://schemas.openxmlformats.org/drawingml/2006/main" xmlns:p="http://schemas.openxmlformats.org/presentationml/2006/main" xmlns:r="http://schemas.openxmlformats.org/officeDocument/2006/relationships">
+  <p:cSld>
+    <p:spTree>
+      <p:nvGrpSpPr>
+        <p:cNvPr id="1" name=""/>
+        <p:cNvGrpSpPr/>
+        <p:nvPr/>
+      </p:nvGrpSpPr>
+      <p:grpSpPr/>
+      <p:sp>
+        <p:nvSpPr>
+          <p:cNvPr id="2" name="TextBox 1"/>
+          <p:cNvSpPr txBox="1"/>
+          <p:nvPr/>
+        </p:nvSpPr>
+        <p:spPr>
+          <a:xfrm>
+            <a:off x="457200" y="320040"/>
+            <a:ext cx="8229600" cy="822960"/>
+          </a:xfrm>
+          <a:prstGeom prst="rect">
+            <a:avLst/>
+          </a:prstGeom>
+          <a:noFill/>
+        </p:spPr>
+        <p:txBody>
+          <a:bodyPr wrap="square">
+            <a:spAutoFit/>
+          </a:bodyPr>
+          <a:lstStyle/>
+          <a:p>
+            <a:r>
+              <a:rPr sz="2600" b="1">
+                <a:solidFill>
+                  <a:srgbClr val="0B3D2E"/>
+                </a:solidFill>
+              </a:rPr>
+              <a:t>❓ Preguntas frecuentes</a:t>
+            </a:r>
+          </a:p>
+        </p:txBody>
+      </p:sp>
+      <p:sp>
+        <p:nvSpPr>
+          <p:cNvPr id="3" name="TextBox 2"/>
+          <p:cNvSpPr txBox="1"/>
+          <p:nvPr/>
+        </p:nvSpPr>
+        <p:spPr>
+          <a:xfrm>
+            <a:off x="457200" y="1280160"/>
+            <a:ext cx="8229600" cy="4937760"/>
+          </a:xfrm>
+          <a:prstGeom prst="rect">
+            <a:avLst/>
+          </a:prstGeom>
+          <a:noFill/>
+        </p:spPr>
+        <p:txBody>
+          <a:bodyPr wrap="square">
+            <a:spAutoFit/>
+          </a:bodyPr>
+          <a:lstStyle/>
+          <a:p>
+            <a:pPr>
+              <a:spcAft>
+                <a:spcPts val="600"/>
+              </a:spcAft>
+            </a:pPr>
+            <a:r>
+              <a:rPr sz="1500">
+                <a:solidFill>
+                  <a:srgbClr val="22282E"/>
+                </a:solidFill>
+              </a:rPr>
+              <a:t>•  ❓ ¿Firmar por familia o por muestra? Por familia. Una regla atada a una muestra caduca con la próxima variante; busca patrones estructurales y de código compartidos.</a:t>
+            </a:r>
+          </a:p>
+          <a:p>
+            <a:pPr>
+              <a:spcAft>
+                <a:spcPts val="600"/>
+              </a:spcAft>
+            </a:pPr>
+            <a:r>
+              <a:rPr sz="1500">
+                <a:solidFill>
+                  <a:srgbClr val="22282E"/>
+                </a:solidFill>
+              </a:rPr>
+              <a:t>•  ❓ ¿YARA sirve en memoria? Sí. Es muy útil escanear volcados de memoria o procesos vivos, donde el código desempacado revela strings ausentes en disco.</a:t>
+            </a:r>
+          </a:p>
+          <a:p>
+            <a:pPr>
+              <a:spcAft>
+                <a:spcPts val="600"/>
+              </a:spcAft>
+            </a:pPr>
+            <a:r>
+              <a:rPr sz="1500">
+                <a:solidFill>
+                  <a:srgbClr val="22282E"/>
+                </a:solidFill>
+              </a:rPr>
+              <a:t>•  ❓ ¿Debo publicar mis reglas? Depende. Compartir ayuda a la comunidad, pero exponer detecciones internas puede permitir al atacante evadirlas; evalúa el contexto.</a:t>
+            </a:r>
+          </a:p>
+        </p:txBody>
+      </p:sp>
+    </p:spTree>
+  </p:cSld>
+  <p:clrMapOvr>
+    <a:masterClrMapping/>
+  </p:clrMapOvr>
+</p:sld>
+</file>
+
+<file path=ppt/slides/slide14.xml><?xml version="1.0" encoding="utf-8"?>
+<p:sld xmlns:a="http://schemas.openxmlformats.org/drawingml/2006/main" xmlns:p="http://schemas.openxmlformats.org/presentationml/2006/main" xmlns:r="http://schemas.openxmlformats.org/officeDocument/2006/relationships">
+  <p:cSld>
+    <p:spTree>
+      <p:nvGrpSpPr>
+        <p:cNvPr id="1" name=""/>
+        <p:cNvGrpSpPr/>
+        <p:nvPr/>
+      </p:nvGrpSpPr>
+      <p:grpSpPr/>
+      <p:sp>
+        <p:nvSpPr>
+          <p:cNvPr id="2" name="TextBox 1"/>
+          <p:cNvSpPr txBox="1"/>
+          <p:nvPr/>
+        </p:nvSpPr>
+        <p:spPr>
+          <a:xfrm>
+            <a:off x="457200" y="320040"/>
+            <a:ext cx="8229600" cy="822960"/>
+          </a:xfrm>
+          <a:prstGeom prst="rect">
+            <a:avLst/>
+          </a:prstGeom>
+          <a:noFill/>
+        </p:spPr>
+        <p:txBody>
+          <a:bodyPr wrap="square">
+            <a:spAutoFit/>
+          </a:bodyPr>
+          <a:lstStyle/>
+          <a:p>
+            <a:r>
+              <a:rPr sz="2600" b="1">
+                <a:solidFill>
+                  <a:srgbClr val="0B3D2E"/>
+                </a:solidFill>
+              </a:rPr>
+              <a:t>🔗 Referencias</a:t>
+            </a:r>
+          </a:p>
+        </p:txBody>
+      </p:sp>
+      <p:sp>
+        <p:nvSpPr>
+          <p:cNvPr id="3" name="TextBox 2"/>
+          <p:cNvSpPr txBox="1"/>
+          <p:nvPr/>
+        </p:nvSpPr>
+        <p:spPr>
+          <a:xfrm>
+            <a:off x="457200" y="1280160"/>
+            <a:ext cx="8229600" cy="4937760"/>
+          </a:xfrm>
+          <a:prstGeom prst="rect">
+            <a:avLst/>
+          </a:prstGeom>
+          <a:noFill/>
+        </p:spPr>
+        <p:txBody>
+          <a:bodyPr wrap="square">
+            <a:spAutoFit/>
+          </a:bodyPr>
+          <a:lstStyle/>
+          <a:p>
+            <a:pPr>
+              <a:spcAft>
+                <a:spcPts val="600"/>
+              </a:spcAft>
+            </a:pPr>
+            <a:r>
+              <a:rPr sz="1500">
+                <a:solidFill>
+                  <a:srgbClr val="22282E"/>
+                </a:solidFill>
+              </a:rPr>
               <a:t>•  YARA Documentation. &lt;https://yara.readthedocs.io&gt;</a:t>
             </a:r>
           </a:p>
@@ -3554,6 +3825,81 @@
           </a:p>
         </p:txBody>
       </p:sp>
+    </p:spTree>
+  </p:cSld>
+  <p:clrMapOvr>
+    <a:masterClrMapping/>
+  </p:clrMapOvr>
+</p:sld>
+</file>
+
+<file path=ppt/slides/slide15.xml><?xml version="1.0" encoding="utf-8"?>
+<p:sld xmlns:a="http://schemas.openxmlformats.org/drawingml/2006/main" xmlns:p="http://schemas.openxmlformats.org/presentationml/2006/main" xmlns:r="http://schemas.openxmlformats.org/officeDocument/2006/relationships">
+  <p:cSld>
+    <p:spTree>
+      <p:nvGrpSpPr>
+        <p:cNvPr id="1" name=""/>
+        <p:cNvGrpSpPr/>
+        <p:nvPr/>
+      </p:nvGrpSpPr>
+      <p:grpSpPr/>
+      <p:sp>
+        <p:nvSpPr>
+          <p:cNvPr id="2" name="TextBox 1"/>
+          <p:cNvSpPr txBox="1"/>
+          <p:nvPr/>
+        </p:nvSpPr>
+        <p:spPr>
+          <a:xfrm>
+            <a:off x="457200" y="274320"/>
+            <a:ext cx="8229600" cy="640080"/>
+          </a:xfrm>
+          <a:prstGeom prst="rect">
+            <a:avLst/>
+          </a:prstGeom>
+          <a:noFill/>
+        </p:spPr>
+        <p:txBody>
+          <a:bodyPr wrap="square">
+            <a:spAutoFit/>
+          </a:bodyPr>
+          <a:lstStyle/>
+          <a:p>
+            <a:r>
+              <a:rPr sz="2200" b="1">
+                <a:solidFill>
+                  <a:srgbClr val="0B3D2E"/>
+                </a:solidFill>
+              </a:rPr>
+              <a:t>Diagrama de la clase</a:t>
+            </a:r>
+          </a:p>
+        </p:txBody>
+      </p:sp>
+      <p:pic>
+        <p:nvPicPr>
+          <p:cNvPr id="3" name="Picture 2" descr="45faf1a01e8e3c50.png"/>
+          <p:cNvPicPr>
+            <a:picLocks noChangeAspect="1"/>
+          </p:cNvPicPr>
+          <p:nvPr/>
+        </p:nvPicPr>
+        <p:blipFill>
+          <a:blip r:embed="rId2"/>
+          <a:stretch>
+            <a:fillRect/>
+          </a:stretch>
+        </p:blipFill>
+        <p:spPr>
+          <a:xfrm>
+            <a:off x="457200" y="3131820"/>
+            <a:ext cx="8229600" cy="1234440"/>
+          </a:xfrm>
+          <a:prstGeom prst="rect">
+            <a:avLst/>
+          </a:prstGeom>
+        </p:spPr>
+      </p:pic>
     </p:spTree>
   </p:cSld>
   <p:clrMapOvr>
@@ -3638,7 +3984,7 @@
                   <a:srgbClr val="22282E"/>
                 </a:solidFill>
               </a:rPr>
-              <a:t>•  Convertir el análisis en detección escribiendo reglas YARA que identifiquen una familia de malware de forma robusta y con bajos falsos positivos. El alumno aprenderá la sintaxis, a elegir buenas cadenas y condiciones, a usar el módulo PE, y a probar y afinar reglas contra un conjunto de muestras y de goodware.</a:t>
+              <a:t>•  Convertir el análisis en detección escribiendo reglas YARA que identifiquen una familia de malware de forma robusta y con bajos falsos positivos. El alumno aprenderá la sintaxis, a elegir buenas…</a:t>
             </a:r>
           </a:p>
         </p:txBody>
@@ -4032,7 +4378,7 @@
                   <a:srgbClr val="0B3D2E"/>
                 </a:solidFill>
               </a:rPr>
-              <a:t>📖 Definiciones y características</a:t>
+              <a:t>🧠 Explicación en profundidad</a:t>
             </a:r>
           </a:p>
         </p:txBody>
@@ -4070,67 +4416,97 @@
                   <a:srgbClr val="22282E"/>
                 </a:solidFill>
               </a:rPr>
-              <a:t>•  Regla YARA: patrón declarativo para clasificar archivos/memoria. Característica clave: strings + condition.</a:t>
-            </a:r>
-          </a:p>
-          <a:p>
-            <a:pPr>
-              <a:spcAft>
-                <a:spcPts val="600"/>
-              </a:spcAft>
-            </a:pPr>
-            <a:r>
-              <a:rPr sz="1500">
-                <a:solidFill>
-                  <a:srgbClr val="22282E"/>
-                </a:solidFill>
-              </a:rPr>
-              <a:t>•  String hex con comodines: patrón de bytes con ??/[n-m]. Característica clave: tolera variación.</a:t>
-            </a:r>
-          </a:p>
-          <a:p>
-            <a:pPr>
-              <a:spcAft>
-                <a:spcPts val="600"/>
-              </a:spcAft>
-            </a:pPr>
-            <a:r>
-              <a:rPr sz="1500">
-                <a:solidFill>
-                  <a:srgbClr val="22282E"/>
-                </a:solidFill>
-              </a:rPr>
-              <a:t>•  imphash (módulo pe): hash de imports. Característica clave: agrupa familia de forma estable.</a:t>
-            </a:r>
-          </a:p>
-          <a:p>
-            <a:pPr>
-              <a:spcAft>
-                <a:spcPts val="600"/>
-              </a:spcAft>
-            </a:pPr>
-            <a:r>
-              <a:rPr sz="1500">
-                <a:solidFill>
-                  <a:srgbClr val="22282E"/>
-                </a:solidFill>
-              </a:rPr>
-              <a:t>•  Falso positivo: regla que marca software legítimo. Característica clave: a minimizar con goodware testing.</a:t>
-            </a:r>
-          </a:p>
-          <a:p>
-            <a:pPr>
-              <a:spcAft>
-                <a:spcPts val="600"/>
-              </a:spcAft>
-            </a:pPr>
-            <a:r>
-              <a:rPr sz="1500">
-                <a:solidFill>
-                  <a:srgbClr val="22282E"/>
-                </a:solidFill>
-              </a:rPr>
-              <a:t>•  Condición: expresión lógica que decide el match. Característica clave: combina evidencias.</a:t>
+              <a:t>•  Analizar una muestra da comprensión, pero su valor se multiplica cuando ese conocimiento se convierte en</a:t>
+            </a:r>
+          </a:p>
+          <a:p>
+            <a:pPr>
+              <a:spcAft>
+                <a:spcPts val="600"/>
+              </a:spcAft>
+            </a:pPr>
+            <a:r>
+              <a:rPr sz="1500">
+                <a:solidFill>
+                  <a:srgbClr val="22282E"/>
+                </a:solidFill>
+              </a:rPr>
+              <a:t>•  una regla de detección que encuentra otras muestras de la misma familia. YARA es el estándar</a:t>
+            </a:r>
+          </a:p>
+          <a:p>
+            <a:pPr>
+              <a:spcAft>
+                <a:spcPts val="600"/>
+              </a:spcAft>
+            </a:pPr>
+            <a:r>
+              <a:rPr sz="1500">
+                <a:solidFill>
+                  <a:srgbClr val="22282E"/>
+                </a:solidFill>
+              </a:rPr>
+              <a:t>•  para eso: un lenguaje para describir patrones —cadenas, secuencias de bytes, condiciones estructurales—</a:t>
+            </a:r>
+          </a:p>
+          <a:p>
+            <a:pPr>
+              <a:spcAft>
+                <a:spcPts val="600"/>
+              </a:spcAft>
+            </a:pPr>
+            <a:r>
+              <a:rPr sz="1500">
+                <a:solidFill>
+                  <a:srgbClr val="22282E"/>
+                </a:solidFill>
+              </a:rPr>
+              <a:t>•  que identifican malware, de modo que una regla escrita a partir de una muestra caza todas sus variantes,</a:t>
+            </a:r>
+          </a:p>
+          <a:p>
+            <a:pPr>
+              <a:spcAft>
+                <a:spcPts val="600"/>
+              </a:spcAft>
+            </a:pPr>
+            <a:r>
+              <a:rPr sz="1500">
+                <a:solidFill>
+                  <a:srgbClr val="22282E"/>
+                </a:solidFill>
+              </a:rPr>
+              <a:t>•  en disco, en memoria y en servicios como VirusTotal. YARA se ha ganado el apodo de "el pattern-matching</a:t>
+            </a:r>
+          </a:p>
+          <a:p>
+            <a:pPr>
+              <a:spcAft>
+                <a:spcPts val="600"/>
+              </a:spcAft>
+            </a:pPr>
+            <a:r>
+              <a:rPr sz="1500">
+                <a:solidFill>
+                  <a:srgbClr val="22282E"/>
+                </a:solidFill>
+              </a:rPr>
+              <a:t>•  del analista de malware", y escribir buenas reglas es una de las habilidades más rentables de la parte,</a:t>
+            </a:r>
+          </a:p>
+          <a:p>
+            <a:pPr>
+              <a:spcAft>
+                <a:spcPts val="600"/>
+              </a:spcAft>
+            </a:pPr>
+            <a:r>
+              <a:rPr sz="1500">
+                <a:solidFill>
+                  <a:srgbClr val="22282E"/>
+                </a:solidFill>
+              </a:rPr>
+              <a:t>•  porque conecta el análisis individual con la detección a escala.</a:t>
             </a:r>
           </a:p>
         </p:txBody>
@@ -4181,7 +4557,7 @@
                   <a:srgbClr val="0B3D2E"/>
                 </a:solidFill>
               </a:rPr>
-              <a:t>🧰 Herramientas y preparación</a:t>
+              <a:t>📖 Definiciones y características</a:t>
             </a:r>
           </a:p>
         </p:txBody>
@@ -4219,52 +4595,67 @@
                   <a:srgbClr val="22282E"/>
                 </a:solidFill>
               </a:rPr>
-              <a:t>•  yara CLI y yara-python.</a:t>
-            </a:r>
-          </a:p>
-          <a:p>
-            <a:pPr>
-              <a:spcAft>
-                <a:spcPts val="600"/>
-              </a:spcAft>
-            </a:pPr>
-            <a:r>
-              <a:rPr sz="1500">
-                <a:solidFill>
-                  <a:srgbClr val="22282E"/>
-                </a:solidFill>
-              </a:rPr>
-              <a:t>•  yarGen (genera reglas candidatas), YARA-CI, capa (para inspirar condiciones).</a:t>
-            </a:r>
-          </a:p>
-          <a:p>
-            <a:pPr>
-              <a:spcAft>
-                <a:spcPts val="600"/>
-              </a:spcAft>
-            </a:pPr>
-            <a:r>
-              <a:rPr sz="1500">
-                <a:solidFill>
-                  <a:srgbClr val="22282E"/>
-                </a:solidFill>
-              </a:rPr>
-              <a:t>•  Conjunto de muestras de una familia + un corpus de goodware (binarios de sistema) para pruebas.</a:t>
-            </a:r>
-          </a:p>
-          <a:p>
-            <a:pPr>
-              <a:spcAft>
-                <a:spcPts val="600"/>
-              </a:spcAft>
-            </a:pPr>
-            <a:r>
-              <a:rPr sz="1500">
-                <a:solidFill>
-                  <a:srgbClr val="22282E"/>
-                </a:solidFill>
-              </a:rPr>
-              <a:t>•  Editor con resaltado YARA.</a:t>
+              <a:t>•  Regla YARA: patrón declarativo para clasificar archivos/memoria. Característica clave: strings + condition.</a:t>
+            </a:r>
+          </a:p>
+          <a:p>
+            <a:pPr>
+              <a:spcAft>
+                <a:spcPts val="600"/>
+              </a:spcAft>
+            </a:pPr>
+            <a:r>
+              <a:rPr sz="1500">
+                <a:solidFill>
+                  <a:srgbClr val="22282E"/>
+                </a:solidFill>
+              </a:rPr>
+              <a:t>•  String hex con comodines: patrón de bytes con ??/[n-m]. Característica clave: tolera variación.</a:t>
+            </a:r>
+          </a:p>
+          <a:p>
+            <a:pPr>
+              <a:spcAft>
+                <a:spcPts val="600"/>
+              </a:spcAft>
+            </a:pPr>
+            <a:r>
+              <a:rPr sz="1500">
+                <a:solidFill>
+                  <a:srgbClr val="22282E"/>
+                </a:solidFill>
+              </a:rPr>
+              <a:t>•  imphash (módulo pe): hash de imports. Característica clave: agrupa familia de forma estable.</a:t>
+            </a:r>
+          </a:p>
+          <a:p>
+            <a:pPr>
+              <a:spcAft>
+                <a:spcPts val="600"/>
+              </a:spcAft>
+            </a:pPr>
+            <a:r>
+              <a:rPr sz="1500">
+                <a:solidFill>
+                  <a:srgbClr val="22282E"/>
+                </a:solidFill>
+              </a:rPr>
+              <a:t>•  Falso positivo: regla que marca software legítimo. Característica clave: a minimizar con goodware testing.</a:t>
+            </a:r>
+          </a:p>
+          <a:p>
+            <a:pPr>
+              <a:spcAft>
+                <a:spcPts val="600"/>
+              </a:spcAft>
+            </a:pPr>
+            <a:r>
+              <a:rPr sz="1500">
+                <a:solidFill>
+                  <a:srgbClr val="22282E"/>
+                </a:solidFill>
+              </a:rPr>
+              <a:t>•  Condición: expresión lógica que decide el match. Característica clave: combina evidencias.</a:t>
             </a:r>
           </a:p>
         </p:txBody>
@@ -4315,7 +4706,7 @@
                   <a:srgbClr val="0B3D2E"/>
                 </a:solidFill>
               </a:rPr>
-              <a:t>🧪 Laboratorio guiado</a:t>
+              <a:t>📔 Glosario</a:t>
             </a:r>
           </a:p>
         </p:txBody>
@@ -4353,97 +4744,97 @@
                   <a:srgbClr val="22282E"/>
                 </a:solidFill>
               </a:rPr>
-              <a:t>•  Toma 3–5 muestras de una familia (previamente analizadas) y extrae strings/estructuras comunes con floss, strings y PEStudio.</a:t>
-            </a:r>
-          </a:p>
-          <a:p>
-            <a:pPr>
-              <a:spcAft>
-                <a:spcPts val="600"/>
-              </a:spcAft>
-            </a:pPr>
-            <a:r>
-              <a:rPr sz="1500">
-                <a:solidFill>
-                  <a:srgbClr val="22282E"/>
-                </a:solidFill>
-              </a:rPr>
-              <a:t>•  Escribe una regla base:</a:t>
-            </a:r>
-          </a:p>
-          <a:p>
-            <a:pPr>
-              <a:spcAft>
-                <a:spcPts val="600"/>
-              </a:spcAft>
-            </a:pPr>
-            <a:r>
-              <a:rPr sz="1500">
-                <a:solidFill>
-                  <a:srgbClr val="22282E"/>
-                </a:solidFill>
-              </a:rPr>
-              <a:t>•  import "pe"</a:t>
-            </a:r>
-          </a:p>
-          <a:p>
-            <a:pPr>
-              <a:spcAft>
-                <a:spcPts val="600"/>
-              </a:spcAft>
-            </a:pPr>
-            <a:r>
-              <a:rPr sz="1500">
-                <a:solidFill>
-                  <a:srgbClr val="22282E"/>
-                </a:solidFill>
-              </a:rPr>
-              <a:t>•  rule FamiliaEjemplo {</a:t>
-            </a:r>
-          </a:p>
-          <a:p>
-            <a:pPr>
-              <a:spcAft>
-                <a:spcPts val="600"/>
-              </a:spcAft>
-            </a:pPr>
-            <a:r>
-              <a:rPr sz="1500">
-                <a:solidFill>
-                  <a:srgbClr val="22282E"/>
-                </a:solidFill>
-              </a:rPr>
-              <a:t>•  meta:</a:t>
-            </a:r>
-          </a:p>
-          <a:p>
-            <a:pPr>
-              <a:spcAft>
-                <a:spcPts val="600"/>
-              </a:spcAft>
-            </a:pPr>
-            <a:r>
-              <a:rPr sz="1500">
-                <a:solidFill>
-                  <a:srgbClr val="22282E"/>
-                </a:solidFill>
-              </a:rPr>
-              <a:t>•  author = "analista"</a:t>
-            </a:r>
-          </a:p>
-          <a:p>
-            <a:pPr>
-              <a:spcAft>
-                <a:spcPts val="600"/>
-              </a:spcAft>
-            </a:pPr>
-            <a:r>
-              <a:rPr sz="1500">
-                <a:solidFill>
-                  <a:srgbClr val="22282E"/>
-                </a:solidFill>
-              </a:rPr>
-              <a:t>•  description = "Detecta la familia X"</a:t>
+              <a:t>•  Término — Definición concisa</a:t>
+            </a:r>
+          </a:p>
+          <a:p>
+            <a:pPr>
+              <a:spcAft>
+                <a:spcPts val="600"/>
+              </a:spcAft>
+            </a:pPr>
+            <a:r>
+              <a:rPr sz="1500">
+                <a:solidFill>
+                  <a:srgbClr val="22282E"/>
+                </a:solidFill>
+              </a:rPr>
+              <a:t>•  YARA — Lenguaje para describir patrones que identifican malware</a:t>
+            </a:r>
+          </a:p>
+          <a:p>
+            <a:pPr>
+              <a:spcAft>
+                <a:spcPts val="600"/>
+              </a:spcAft>
+            </a:pPr>
+            <a:r>
+              <a:rPr sz="1500">
+                <a:solidFill>
+                  <a:srgbClr val="22282E"/>
+                </a:solidFill>
+              </a:rPr>
+              <a:t>•  Regla — Unidad de YARA: meta, strings y condition</a:t>
+            </a:r>
+          </a:p>
+          <a:p>
+            <a:pPr>
+              <a:spcAft>
+                <a:spcPts val="600"/>
+              </a:spcAft>
+            </a:pPr>
+            <a:r>
+              <a:rPr sz="1500">
+                <a:solidFill>
+                  <a:srgbClr val="22282E"/>
+                </a:solidFill>
+              </a:rPr>
+              <a:t>•  meta — Metadatos de la regla (autor, familia, referencia)</a:t>
+            </a:r>
+          </a:p>
+          <a:p>
+            <a:pPr>
+              <a:spcAft>
+                <a:spcPts val="600"/>
+              </a:spcAft>
+            </a:pPr>
+            <a:r>
+              <a:rPr sz="1500">
+                <a:solidFill>
+                  <a:srgbClr val="22282E"/>
+                </a:solidFill>
+              </a:rPr>
+              <a:t>•  strings — Patrones a buscar</a:t>
+            </a:r>
+          </a:p>
+          <a:p>
+            <a:pPr>
+              <a:spcAft>
+                <a:spcPts val="600"/>
+              </a:spcAft>
+            </a:pPr>
+            <a:r>
+              <a:rPr sz="1500">
+                <a:solidFill>
+                  <a:srgbClr val="22282E"/>
+                </a:solidFill>
+              </a:rPr>
+              <a:t>•  condition — Expresión booleana que dispara la regla</a:t>
+            </a:r>
+          </a:p>
+          <a:p>
+            <a:pPr>
+              <a:spcAft>
+                <a:spcPts val="600"/>
+              </a:spcAft>
+            </a:pPr>
+            <a:r>
+              <a:rPr sz="1500">
+                <a:solidFill>
+                  <a:srgbClr val="22282E"/>
+                </a:solidFill>
+              </a:rPr>
+              <a:t>•  Cadena de texto — Literal, con nocase, wide, ascii</a:t>
             </a:r>
           </a:p>
         </p:txBody>
@@ -4494,7 +4885,7 @@
                   <a:srgbClr val="0B3D2E"/>
                 </a:solidFill>
               </a:rPr>
-              <a:t>✍️ Ejercicios</a:t>
+              <a:t>🧰 Herramientas y preparación</a:t>
             </a:r>
           </a:p>
         </p:txBody>
@@ -4532,82 +4923,52 @@
                   <a:srgbClr val="22282E"/>
                 </a:solidFill>
               </a:rPr>
-              <a:t>•  Escribe una regla con cadenas de texto, hex y regex.</a:t>
-            </a:r>
-          </a:p>
-          <a:p>
-            <a:pPr>
-              <a:spcAft>
-                <a:spcPts val="600"/>
-              </a:spcAft>
-            </a:pPr>
-            <a:r>
-              <a:rPr sz="1500">
-                <a:solidFill>
-                  <a:srgbClr val="22282E"/>
-                </a:solidFill>
-              </a:rPr>
-              <a:t>•  Convierte una firma frágil (una sola string) en una robusta (varias evidencias).</a:t>
-            </a:r>
-          </a:p>
-          <a:p>
-            <a:pPr>
-              <a:spcAft>
-                <a:spcPts val="600"/>
-              </a:spcAft>
-            </a:pPr>
-            <a:r>
-              <a:rPr sz="1500">
-                <a:solidFill>
-                  <a:srgbClr val="22282E"/>
-                </a:solidFill>
-              </a:rPr>
-              <a:t>•  Usa pe.imphash() para agrupar una familia.</a:t>
-            </a:r>
-          </a:p>
-          <a:p>
-            <a:pPr>
-              <a:spcAft>
-                <a:spcPts val="600"/>
-              </a:spcAft>
-            </a:pPr>
-            <a:r>
-              <a:rPr sz="1500">
-                <a:solidFill>
-                  <a:srgbClr val="22282E"/>
-                </a:solidFill>
-              </a:rPr>
-              <a:t>•  Provoca un falso positivo a propósito y luego corrígelo.</a:t>
-            </a:r>
-          </a:p>
-          <a:p>
-            <a:pPr>
-              <a:spcAft>
-                <a:spcPts val="600"/>
-              </a:spcAft>
-            </a:pPr>
-            <a:r>
-              <a:rPr sz="1500">
-                <a:solidFill>
-                  <a:srgbClr val="22282E"/>
-                </a:solidFill>
-              </a:rPr>
-              <a:t>•  Explica cuándo usar all of them vs N of ($s).</a:t>
-            </a:r>
-          </a:p>
-          <a:p>
-            <a:pPr>
-              <a:spcAft>
-                <a:spcPts val="600"/>
-              </a:spcAft>
-            </a:pPr>
-            <a:r>
-              <a:rPr sz="1500">
-                <a:solidFill>
-                  <a:srgbClr val="22282E"/>
-                </a:solidFill>
-              </a:rPr>
-              <a:t>•  Documenta el meta mínimo recomendable de una regla.</a:t>
+              <a:t>•  yara CLI y yara-python.</a:t>
+            </a:r>
+          </a:p>
+          <a:p>
+            <a:pPr>
+              <a:spcAft>
+                <a:spcPts val="600"/>
+              </a:spcAft>
+            </a:pPr>
+            <a:r>
+              <a:rPr sz="1500">
+                <a:solidFill>
+                  <a:srgbClr val="22282E"/>
+                </a:solidFill>
+              </a:rPr>
+              <a:t>•  yarGen (genera reglas candidatas), YARA-CI, capa (para inspirar condiciones).</a:t>
+            </a:r>
+          </a:p>
+          <a:p>
+            <a:pPr>
+              <a:spcAft>
+                <a:spcPts val="600"/>
+              </a:spcAft>
+            </a:pPr>
+            <a:r>
+              <a:rPr sz="1500">
+                <a:solidFill>
+                  <a:srgbClr val="22282E"/>
+                </a:solidFill>
+              </a:rPr>
+              <a:t>•  Conjunto de muestras de una familia + un corpus de goodware (binarios de sistema) para pruebas.</a:t>
+            </a:r>
+          </a:p>
+          <a:p>
+            <a:pPr>
+              <a:spcAft>
+                <a:spcPts val="600"/>
+              </a:spcAft>
+            </a:pPr>
+            <a:r>
+              <a:rPr sz="1500">
+                <a:solidFill>
+                  <a:srgbClr val="22282E"/>
+                </a:solidFill>
+              </a:rPr>
+              <a:t>•  Editor con resaltado YARA.</a:t>
             </a:r>
           </a:p>
         </p:txBody>
@@ -4658,7 +5019,7 @@
                   <a:srgbClr val="0B3D2E"/>
                 </a:solidFill>
               </a:rPr>
-              <a:t>📝 Reto verificable</a:t>
+              <a:t>🧪 Laboratorio guiado</a:t>
             </a:r>
           </a:p>
         </p:txBody>
@@ -4696,22 +5057,97 @@
                   <a:srgbClr val="22282E"/>
                 </a:solidFill>
               </a:rPr>
-              <a:t>•  Entrega una regla YARA para una familia que detecte todas tus muestras objetivo y ninguna del corpus de goodware, con meta completo y al menos una condición estructural (pe/imphash).</a:t>
-            </a:r>
-          </a:p>
-          <a:p>
-            <a:pPr>
-              <a:spcAft>
-                <a:spcPts val="600"/>
-              </a:spcAft>
-            </a:pPr>
-            <a:r>
-              <a:rPr sz="1500">
-                <a:solidFill>
-                  <a:srgbClr val="22282E"/>
-                </a:solidFill>
-              </a:rPr>
-              <a:t>•  Criterio de aceptación: yara -r marca el 100% de las muestras de la familia y 0 archivos del corpus de goodware de prueba, y la regla incluye una condición del módulo pe.</a:t>
+              <a:t>•  Toma 3–5 muestras de una familia (previamente analizadas) y extrae strings/estructuras comunes con floss, strings y PEStudio.</a:t>
+            </a:r>
+          </a:p>
+          <a:p>
+            <a:pPr>
+              <a:spcAft>
+                <a:spcPts val="600"/>
+              </a:spcAft>
+            </a:pPr>
+            <a:r>
+              <a:rPr sz="1500">
+                <a:solidFill>
+                  <a:srgbClr val="22282E"/>
+                </a:solidFill>
+              </a:rPr>
+              <a:t>•  Escribe una regla base:</a:t>
+            </a:r>
+          </a:p>
+          <a:p>
+            <a:pPr>
+              <a:spcAft>
+                <a:spcPts val="600"/>
+              </a:spcAft>
+            </a:pPr>
+            <a:r>
+              <a:rPr sz="1500">
+                <a:solidFill>
+                  <a:srgbClr val="22282E"/>
+                </a:solidFill>
+              </a:rPr>
+              <a:t>•  Añade una condición estructural con el módulo pe: pe.imphash() == "..." o pe.numberofsections.</a:t>
+            </a:r>
+          </a:p>
+          <a:p>
+            <a:pPr>
+              <a:spcAft>
+                <a:spcPts val="600"/>
+              </a:spcAft>
+            </a:pPr>
+            <a:r>
+              <a:rPr sz="1500">
+                <a:solidFill>
+                  <a:srgbClr val="22282E"/>
+                </a:solidFill>
+              </a:rPr>
+              <a:t>•  Prueba: yara -r regla.yar carpetamuestras/ debe marcar las muestras de la familia.</a:t>
+            </a:r>
+          </a:p>
+          <a:p>
+            <a:pPr>
+              <a:spcAft>
+                <a:spcPts val="600"/>
+              </a:spcAft>
+            </a:pPr>
+            <a:r>
+              <a:rPr sz="1500">
+                <a:solidFill>
+                  <a:srgbClr val="22282E"/>
+                </a:solidFill>
+              </a:rPr>
+              <a:t>•  Ejecuta la regla contra el corpus de goodware: yara -r regla.yar C:\Windows\System32\. Si hay matches, endurece cadenas/condición.</a:t>
+            </a:r>
+          </a:p>
+          <a:p>
+            <a:pPr>
+              <a:spcAft>
+                <a:spcPts val="600"/>
+              </a:spcAft>
+            </a:pPr>
+            <a:r>
+              <a:rPr sz="1500">
+                <a:solidFill>
+                  <a:srgbClr val="22282E"/>
+                </a:solidFill>
+              </a:rPr>
+              <a:t>•  Genera candidatas con yarGen y compáralas con tu regla manual; combina lo mejor de ambas.</a:t>
+            </a:r>
+          </a:p>
+          <a:p>
+            <a:pPr>
+              <a:spcAft>
+                <a:spcPts val="600"/>
+              </a:spcAft>
+            </a:pPr>
+            <a:r>
+              <a:rPr sz="1500">
+                <a:solidFill>
+                  <a:srgbClr val="22282E"/>
+                </a:solidFill>
+              </a:rPr>
+              <a:t>•  Ajusta hasta lograr cobertura de la familia con cero falsos positivos en tu corpus. Documenta la regla y su tasa de acierto.</a:t>
             </a:r>
           </a:p>
         </p:txBody>
